--- a/EIT_5/Basics of Power Engineering/Power Quality in electrical distribution systems and buildings_group work.pptx
+++ b/EIT_5/Basics of Power Engineering/Power Quality in electrical distribution systems and buildings_group work.pptx
@@ -108,6 +108,11 @@
       </a:defRPr>
     </a:lvl9pPr>
   </p:defaultTextStyle>
+  <p:extLst>
+    <p:ext uri="{EFAFB233-063F-42B5-8137-9DF3F51BA10A}">
+      <p15:sldGuideLst xmlns:p15="http://schemas.microsoft.com/office/powerpoint/2012/main"/>
+    </p:ext>
+  </p:extLst>
 </p:presentation>
 </file>
 
@@ -862,7 +867,7 @@
 <dgm:dataModel xmlns:dgm="http://schemas.openxmlformats.org/drawingml/2006/diagram" xmlns:a="http://schemas.openxmlformats.org/drawingml/2006/main">
   <dgm:ptLst>
     <dgm:pt modelId="{D1FA085D-C638-4F07-9DA4-FA57A67B8278}" type="doc">
-      <dgm:prSet loTypeId="urn:microsoft.com/office/officeart/2005/8/layout/vList5" loCatId="list" qsTypeId="urn:microsoft.com/office/officeart/2005/8/quickstyle/simple1#12" qsCatId="simple" csTypeId="urn:microsoft.com/office/officeart/2005/8/colors/accent3_2#3" csCatId="accent3"/>
+      <dgm:prSet loTypeId="urn:microsoft.com/office/officeart/2005/8/layout/vList5" loCatId="list" qsTypeId="urn:microsoft.com/office/officeart/2005/8/quickstyle/simple1#12" qsCatId="simple" csTypeId="urn:microsoft.com/office/officeart/2005/8/colors/accent3_2#3" csCatId="accent3" phldr="1"/>
       <dgm:spPr/>
       <dgm:t>
         <a:bodyPr/>
@@ -1268,42 +1273,6 @@
         </a:p>
       </dgm:t>
     </dgm:pt>
-    <dgm:pt modelId="{8B3A9379-0180-4298-8187-4E04391602B9}">
-      <dgm:prSet/>
-      <dgm:spPr/>
-      <dgm:t>
-        <a:bodyPr/>
-        <a:lstStyle/>
-        <a:p>
-          <a:r>
-            <a:rPr lang="en-US"/>
-            <a:t>Mostly 400V and 10kV and 20kV</a:t>
-          </a:r>
-        </a:p>
-      </dgm:t>
-    </dgm:pt>
-    <dgm:pt modelId="{40A8370B-99B3-4C63-9429-B3DCF4F6EFE4}" type="parTrans" cxnId="{A205E165-0DCF-4461-ADBC-718C96D46E9F}">
-      <dgm:prSet/>
-      <dgm:spPr/>
-      <dgm:t>
-        <a:bodyPr/>
-        <a:lstStyle/>
-        <a:p>
-          <a:endParaRPr lang="en-US"/>
-        </a:p>
-      </dgm:t>
-    </dgm:pt>
-    <dgm:pt modelId="{DF64D041-76E8-4F34-B4E0-4B76766BBC95}" type="sibTrans" cxnId="{A205E165-0DCF-4461-ADBC-718C96D46E9F}">
-      <dgm:prSet/>
-      <dgm:spPr/>
-      <dgm:t>
-        <a:bodyPr/>
-        <a:lstStyle/>
-        <a:p>
-          <a:endParaRPr lang="en-US"/>
-        </a:p>
-      </dgm:t>
-    </dgm:pt>
     <dgm:pt modelId="{236A5B7D-FC99-4638-8ADA-5EC5B05CD631}">
       <dgm:prSet/>
       <dgm:spPr/>
@@ -1312,7 +1281,7 @@
         <a:lstStyle/>
         <a:p>
           <a:r>
-            <a:rPr lang="en-US"/>
+            <a:rPr lang="en-US" dirty="0"/>
             <a:t>21 – 29 cents per kWh</a:t>
           </a:r>
         </a:p>
@@ -1523,16 +1492,15 @@
     <dgm:cxn modelId="{8BB04608-8E3C-4585-9AD6-6FD5DC239D51}" srcId="{09ACDABD-41AF-4C4F-BA48-9AC8A762E080}" destId="{CA2458B3-DEBA-47A2-9DEF-A69F5C454E4E}" srcOrd="2" destOrd="0" parTransId="{A99DD63A-B1F1-4374-8B5F-A5A741B0FE91}" sibTransId="{093F50AE-E20E-4FF6-9AE0-FA0DFD2830A6}"/>
     <dgm:cxn modelId="{DF6CAB0B-E384-45DC-9C2A-8A0538C6805E}" type="presOf" srcId="{75717ABC-EB86-48BB-8877-02E782E20993}" destId="{9C79A395-EAD3-49F8-A44A-5BD2290E3531}" srcOrd="0" destOrd="1" presId="urn:microsoft.com/office/officeart/2005/8/layout/vList5"/>
     <dgm:cxn modelId="{E45AF10F-BED2-404D-8384-AD35DC869C8C}" srcId="{09ACDABD-41AF-4C4F-BA48-9AC8A762E080}" destId="{F57D8AD5-B8B9-4456-8A35-64575D57A6BA}" srcOrd="1" destOrd="0" parTransId="{4E9E505E-4D56-492D-8745-AC3F7D298FC0}" sibTransId="{B6BAC981-499B-4311-BF07-7BEC4D16094A}"/>
-    <dgm:cxn modelId="{E6E3FA0F-0393-47BB-BCDF-43E411364674}" type="presOf" srcId="{236A5B7D-FC99-4638-8ADA-5EC5B05CD631}" destId="{9C79A395-EAD3-49F8-A44A-5BD2290E3531}" srcOrd="0" destOrd="3" presId="urn:microsoft.com/office/officeart/2005/8/layout/vList5"/>
+    <dgm:cxn modelId="{E6E3FA0F-0393-47BB-BCDF-43E411364674}" type="presOf" srcId="{236A5B7D-FC99-4638-8ADA-5EC5B05CD631}" destId="{9C79A395-EAD3-49F8-A44A-5BD2290E3531}" srcOrd="0" destOrd="2" presId="urn:microsoft.com/office/officeart/2005/8/layout/vList5"/>
     <dgm:cxn modelId="{F87E611A-2084-4440-B1F9-6AA7299A47E6}" type="presOf" srcId="{F57D8AD5-B8B9-4456-8A35-64575D57A6BA}" destId="{0BECD4D4-8344-4908-9D9A-774C02E3B09C}" srcOrd="0" destOrd="1" presId="urn:microsoft.com/office/officeart/2005/8/layout/vList5"/>
     <dgm:cxn modelId="{C8AE102F-7065-4007-B929-517D7F1760E0}" type="presOf" srcId="{CA2458B3-DEBA-47A2-9DEF-A69F5C454E4E}" destId="{0BECD4D4-8344-4908-9D9A-774C02E3B09C}" srcOrd="0" destOrd="2" presId="urn:microsoft.com/office/officeart/2005/8/layout/vList5"/>
     <dgm:cxn modelId="{341E3C33-99D3-48AF-B2A0-7D2CBFC0CCDD}" srcId="{CBEB88EF-3C8C-435A-ABA0-6665B4C0A61E}" destId="{75717ABC-EB86-48BB-8877-02E782E20993}" srcOrd="1" destOrd="0" parTransId="{CBD4D6B0-EDF7-48C6-B8E4-8FA523C303F3}" sibTransId="{1AE5AE63-52CB-498A-9927-D0BFAC5B1491}"/>
-    <dgm:cxn modelId="{9762D03B-4151-4CF7-8B34-AD7073045DA6}" srcId="{CBEB88EF-3C8C-435A-ABA0-6665B4C0A61E}" destId="{236A5B7D-FC99-4638-8ADA-5EC5B05CD631}" srcOrd="3" destOrd="0" parTransId="{502B0442-59FC-4864-A3D3-8042A6BE42E1}" sibTransId="{C93AE11D-B93B-4FCA-9D23-8D39D5EFF9D2}"/>
+    <dgm:cxn modelId="{9762D03B-4151-4CF7-8B34-AD7073045DA6}" srcId="{CBEB88EF-3C8C-435A-ABA0-6665B4C0A61E}" destId="{236A5B7D-FC99-4638-8ADA-5EC5B05CD631}" srcOrd="2" destOrd="0" parTransId="{502B0442-59FC-4864-A3D3-8042A6BE42E1}" sibTransId="{C93AE11D-B93B-4FCA-9D23-8D39D5EFF9D2}"/>
     <dgm:cxn modelId="{7C82943D-D1BB-4863-8B16-2A876E32A194}" type="presOf" srcId="{78A50D59-D837-4825-8713-4CF307DA28CD}" destId="{9C79A395-EAD3-49F8-A44A-5BD2290E3531}" srcOrd="0" destOrd="0" presId="urn:microsoft.com/office/officeart/2005/8/layout/vList5"/>
     <dgm:cxn modelId="{C12FE03D-D65A-4EA8-BF27-6154417D47FC}" type="presOf" srcId="{56007DD6-E9FA-4419-BF18-F27A07D3D134}" destId="{52DEF9A4-2BEF-472B-A88C-CE534AD0FA3C}" srcOrd="0" destOrd="0" presId="urn:microsoft.com/office/officeart/2005/8/layout/vList5"/>
     <dgm:cxn modelId="{A683E262-5828-458A-B46A-2A7EB3B270B9}" type="presOf" srcId="{C36C3AE7-DD1A-47C1-BB48-70B91FF9D5DB}" destId="{9CCCCEF9-608C-47A2-97D3-2C7B68417412}" srcOrd="0" destOrd="0" presId="urn:microsoft.com/office/officeart/2005/8/layout/vList5"/>
     <dgm:cxn modelId="{9124DF43-B392-4E1C-96A4-A2F5A997E50D}" srcId="{C36C3AE7-DD1A-47C1-BB48-70B91FF9D5DB}" destId="{931328FF-6220-4F9B-8A2E-0673BC21B967}" srcOrd="1" destOrd="0" parTransId="{F909B066-0A71-4390-97B8-9530E70C3243}" sibTransId="{451E6F80-2395-46A0-A04C-321F7BF77C68}"/>
-    <dgm:cxn modelId="{A205E165-0DCF-4461-ADBC-718C96D46E9F}" srcId="{CBEB88EF-3C8C-435A-ABA0-6665B4C0A61E}" destId="{8B3A9379-0180-4298-8187-4E04391602B9}" srcOrd="2" destOrd="0" parTransId="{40A8370B-99B3-4C63-9429-B3DCF4F6EFE4}" sibTransId="{DF64D041-76E8-4F34-B4E0-4B76766BBC95}"/>
     <dgm:cxn modelId="{B6D93B4B-21EC-4246-9BB0-1B133E9AC839}" srcId="{D1FA085D-C638-4F07-9DA4-FA57A67B8278}" destId="{CBEB88EF-3C8C-435A-ABA0-6665B4C0A61E}" srcOrd="2" destOrd="0" parTransId="{E43D4260-5A48-4DB1-ABDF-D3135AD98D0F}" sibTransId="{9A0E586E-7502-413F-9B42-5CB3E2C7C32A}"/>
     <dgm:cxn modelId="{4EB4EC6B-D093-4C3E-B453-C9948B4D1DBE}" srcId="{D1FA085D-C638-4F07-9DA4-FA57A67B8278}" destId="{C36C3AE7-DD1A-47C1-BB48-70B91FF9D5DB}" srcOrd="0" destOrd="0" parTransId="{0FC31A90-6B22-4239-81A3-F3F46C176B21}" sibTransId="{65E7DB95-B951-403D-ADE6-18CF0C7915E1}"/>
     <dgm:cxn modelId="{F8B4BA4D-0FCE-4BE6-9AD9-2CF5B58E3F24}" type="presOf" srcId="{09ACDABD-41AF-4C4F-BA48-9AC8A762E080}" destId="{D8E312FA-B4A6-4DA5-9108-BF735B8356D3}" srcOrd="0" destOrd="0" presId="urn:microsoft.com/office/officeart/2005/8/layout/vList5"/>
@@ -1544,7 +1512,6 @@
     <dgm:cxn modelId="{E878B98D-631D-43E4-8096-0CDACE7999A9}" type="presOf" srcId="{CBEB88EF-3C8C-435A-ABA0-6665B4C0A61E}" destId="{09DCEC05-D3F0-47FC-AAA3-C784D9B0121B}" srcOrd="0" destOrd="0" presId="urn:microsoft.com/office/officeart/2005/8/layout/vList5"/>
     <dgm:cxn modelId="{53DB599B-E90C-4406-A884-8307F9DBDA57}" srcId="{C36C3AE7-DD1A-47C1-BB48-70B91FF9D5DB}" destId="{5003EA8C-52F2-4269-8A4B-D864E96D47B1}" srcOrd="2" destOrd="0" parTransId="{8AA06371-14B5-49DB-AE58-34E1D02CE6F3}" sibTransId="{EBBB9B90-4FEC-4B1A-9804-D49BD26DBA39}"/>
     <dgm:cxn modelId="{301014A3-EAF4-4537-96E8-A087B0186398}" type="presOf" srcId="{CA197B95-430E-4F54-97FB-E66146AD2449}" destId="{C967E21E-9E92-40AF-87B6-6135881F525C}" srcOrd="0" destOrd="0" presId="urn:microsoft.com/office/officeart/2005/8/layout/vList5"/>
-    <dgm:cxn modelId="{EC2680A7-AB54-4138-AAAD-440461966D12}" type="presOf" srcId="{8B3A9379-0180-4298-8187-4E04391602B9}" destId="{9C79A395-EAD3-49F8-A44A-5BD2290E3531}" srcOrd="0" destOrd="2" presId="urn:microsoft.com/office/officeart/2005/8/layout/vList5"/>
     <dgm:cxn modelId="{F084D5B9-7B3F-4598-A775-940F36D6875B}" srcId="{D1FA085D-C638-4F07-9DA4-FA57A67B8278}" destId="{5D15668E-EAA7-42EB-AE9E-C26B4A22308A}" srcOrd="3" destOrd="0" parTransId="{7C7A9582-34D8-4CB4-828B-2282F050C0E6}" sibTransId="{E5AED51D-8DEE-4880-BC92-CC88E77E9BCE}"/>
     <dgm:cxn modelId="{DB2A1CBA-7C4F-49E4-8269-5719835528B4}" srcId="{5D15668E-EAA7-42EB-AE9E-C26B4A22308A}" destId="{56007DD6-E9FA-4419-BF18-F27A07D3D134}" srcOrd="0" destOrd="0" parTransId="{E01903C9-84CA-4E9E-A188-1E4DC9E56E64}" sibTransId="{56E305E8-977F-4AEE-B4BA-A9D75D4CCE3C}"/>
     <dgm:cxn modelId="{97A579E3-D43C-4327-96CB-AED5EC641829}" type="presOf" srcId="{EAAEB620-C9ED-4EFB-83BD-90BC259B818A}" destId="{0BECD4D4-8344-4908-9D9A-774C02E3B09C}" srcOrd="0" destOrd="0" presId="urn:microsoft.com/office/officeart/2005/8/layout/vList5"/>
@@ -1637,12 +1604,12 @@
         <a:fontRef idx="minor"/>
       </dsp:style>
       <dsp:txBody>
-        <a:bodyPr spcFirstLastPara="0" vert="horz" wrap="square" lIns="41910" tIns="20955" rIns="41910" bIns="20955" numCol="1" spcCol="1270" anchor="ctr" anchorCtr="0">
+        <a:bodyPr spcFirstLastPara="0" vert="horz" wrap="square" lIns="57150" tIns="28575" rIns="57150" bIns="28575" numCol="1" spcCol="1270" anchor="ctr" anchorCtr="0">
           <a:noAutofit/>
         </a:bodyPr>
         <a:lstStyle/>
         <a:p>
-          <a:pPr marL="57150" lvl="1" indent="-57150" algn="l" defTabSz="488950">
+          <a:pPr marL="114300" lvl="1" indent="-114300" algn="l" defTabSz="666750">
             <a:lnSpc>
               <a:spcPct val="90000"/>
             </a:lnSpc>
@@ -1655,12 +1622,12 @@
             <a:buChar char="•"/>
           </a:pPr>
           <a:r>
-            <a:rPr lang="en-US" sz="1100" kern="1200"/>
+            <a:rPr lang="en-US" sz="1500" kern="1200"/>
             <a:t>high standards in terms of quality</a:t>
           </a:r>
         </a:p>
         <a:p>
-          <a:pPr marL="57150" lvl="1" indent="-57150" algn="l" defTabSz="488950">
+          <a:pPr marL="114300" lvl="1" indent="-114300" algn="l" defTabSz="666750">
             <a:lnSpc>
               <a:spcPct val="90000"/>
             </a:lnSpc>
@@ -1673,12 +1640,12 @@
             <a:buChar char="•"/>
           </a:pPr>
           <a:r>
-            <a:rPr lang="en-US" sz="1100" kern="1200"/>
+            <a:rPr lang="en-US" sz="1500" kern="1200"/>
             <a:t>77 Distribution Companies</a:t>
           </a:r>
         </a:p>
         <a:p>
-          <a:pPr marL="57150" lvl="1" indent="-57150" algn="l" defTabSz="488950">
+          <a:pPr marL="114300" lvl="1" indent="-114300" algn="l" defTabSz="666750">
             <a:lnSpc>
               <a:spcPct val="90000"/>
             </a:lnSpc>
@@ -1691,7 +1658,7 @@
             <a:buChar char="•"/>
           </a:pPr>
           <a:r>
-            <a:rPr lang="en-US" sz="1100" kern="1200"/>
+            <a:rPr lang="en-US" sz="1500" kern="1200"/>
             <a:t>22 – 23 cents per kWh</a:t>
           </a:r>
         </a:p>
@@ -1831,12 +1798,12 @@
         <a:fontRef idx="minor"/>
       </dsp:style>
       <dsp:txBody>
-        <a:bodyPr spcFirstLastPara="0" vert="horz" wrap="square" lIns="41910" tIns="20955" rIns="41910" bIns="20955" numCol="1" spcCol="1270" anchor="ctr" anchorCtr="0">
+        <a:bodyPr spcFirstLastPara="0" vert="horz" wrap="square" lIns="57150" tIns="28575" rIns="57150" bIns="28575" numCol="1" spcCol="1270" anchor="ctr" anchorCtr="0">
           <a:noAutofit/>
         </a:bodyPr>
         <a:lstStyle/>
         <a:p>
-          <a:pPr marL="57150" lvl="1" indent="-57150" algn="l" defTabSz="488950">
+          <a:pPr marL="114300" lvl="1" indent="-114300" algn="l" defTabSz="666750">
             <a:lnSpc>
               <a:spcPct val="90000"/>
             </a:lnSpc>
@@ -1849,12 +1816,12 @@
             <a:buChar char="•"/>
           </a:pPr>
           <a:r>
-            <a:rPr lang="en-US" sz="1100" kern="1200"/>
+            <a:rPr lang="en-US" sz="1500" kern="1200"/>
             <a:t>Lower standards in terms of quality</a:t>
           </a:r>
         </a:p>
         <a:p>
-          <a:pPr marL="57150" lvl="1" indent="-57150" algn="l" defTabSz="488950">
+          <a:pPr marL="114300" lvl="1" indent="-114300" algn="l" defTabSz="666750">
             <a:lnSpc>
               <a:spcPct val="90000"/>
             </a:lnSpc>
@@ -1867,12 +1834,12 @@
             <a:buChar char="•"/>
           </a:pPr>
           <a:r>
-            <a:rPr lang="en-US" sz="1100" kern="1200"/>
+            <a:rPr lang="en-US" sz="1500" kern="1200"/>
             <a:t>6 Distribution Companies</a:t>
           </a:r>
         </a:p>
         <a:p>
-          <a:pPr marL="57150" lvl="1" indent="-57150" algn="l" defTabSz="488950">
+          <a:pPr marL="114300" lvl="1" indent="-114300" algn="l" defTabSz="666750">
             <a:lnSpc>
               <a:spcPct val="90000"/>
             </a:lnSpc>
@@ -1885,7 +1852,7 @@
             <a:buChar char="•"/>
           </a:pPr>
           <a:r>
-            <a:rPr lang="en-US" sz="1100" kern="1200"/>
+            <a:rPr lang="en-US" sz="1500" kern="1200"/>
             <a:t>3,5 - 10 cents per kWh</a:t>
           </a:r>
         </a:p>
@@ -2025,12 +1992,12 @@
         <a:fontRef idx="minor"/>
       </dsp:style>
       <dsp:txBody>
-        <a:bodyPr spcFirstLastPara="0" vert="horz" wrap="square" lIns="41910" tIns="20955" rIns="41910" bIns="20955" numCol="1" spcCol="1270" anchor="ctr" anchorCtr="0">
+        <a:bodyPr spcFirstLastPara="0" vert="horz" wrap="square" lIns="57150" tIns="28575" rIns="57150" bIns="28575" numCol="1" spcCol="1270" anchor="ctr" anchorCtr="0">
           <a:noAutofit/>
         </a:bodyPr>
         <a:lstStyle/>
         <a:p>
-          <a:pPr marL="57150" lvl="1" indent="-57150" algn="l" defTabSz="488950">
+          <a:pPr marL="114300" lvl="1" indent="-114300" algn="l" defTabSz="666750">
             <a:lnSpc>
               <a:spcPct val="90000"/>
             </a:lnSpc>
@@ -2043,12 +2010,12 @@
             <a:buChar char="•"/>
           </a:pPr>
           <a:r>
-            <a:rPr lang="en-US" sz="1100" kern="1200"/>
+            <a:rPr lang="en-US" sz="1500" kern="1200"/>
             <a:t>high standards in terms of quality</a:t>
           </a:r>
         </a:p>
         <a:p>
-          <a:pPr marL="57150" lvl="1" indent="-57150" algn="l" defTabSz="488950">
+          <a:pPr marL="114300" lvl="1" indent="-114300" algn="l" defTabSz="666750">
             <a:lnSpc>
               <a:spcPct val="90000"/>
             </a:lnSpc>
@@ -2061,12 +2028,12 @@
             <a:buChar char="•"/>
           </a:pPr>
           <a:r>
-            <a:rPr lang="en-US" sz="1100" kern="1200"/>
+            <a:rPr lang="en-US" sz="1500" kern="1200"/>
             <a:t>115 Distribution Companies</a:t>
           </a:r>
         </a:p>
         <a:p>
-          <a:pPr marL="57150" lvl="1" indent="-57150" algn="l" defTabSz="488950">
+          <a:pPr marL="114300" lvl="1" indent="-114300" algn="l" defTabSz="666750">
             <a:lnSpc>
               <a:spcPct val="90000"/>
             </a:lnSpc>
@@ -2079,25 +2046,7 @@
             <a:buChar char="•"/>
           </a:pPr>
           <a:r>
-            <a:rPr lang="en-US" sz="1100" kern="1200"/>
-            <a:t>Mostly 400V and 10kV and 20kV</a:t>
-          </a:r>
-        </a:p>
-        <a:p>
-          <a:pPr marL="57150" lvl="1" indent="-57150" algn="l" defTabSz="488950">
-            <a:lnSpc>
-              <a:spcPct val="90000"/>
-            </a:lnSpc>
-            <a:spcBef>
-              <a:spcPct val="0"/>
-            </a:spcBef>
-            <a:spcAft>
-              <a:spcPct val="15000"/>
-            </a:spcAft>
-            <a:buChar char="•"/>
-          </a:pPr>
-          <a:r>
-            <a:rPr lang="en-US" sz="1100" kern="1200"/>
+            <a:rPr lang="en-US" sz="1500" kern="1200" dirty="0"/>
             <a:t>21 – 29 cents per kWh</a:t>
           </a:r>
         </a:p>
@@ -2237,12 +2186,12 @@
         <a:fontRef idx="minor"/>
       </dsp:style>
       <dsp:txBody>
-        <a:bodyPr spcFirstLastPara="0" vert="horz" wrap="square" lIns="41910" tIns="20955" rIns="41910" bIns="20955" numCol="1" spcCol="1270" anchor="ctr" anchorCtr="0">
+        <a:bodyPr spcFirstLastPara="0" vert="horz" wrap="square" lIns="57150" tIns="28575" rIns="57150" bIns="28575" numCol="1" spcCol="1270" anchor="ctr" anchorCtr="0">
           <a:noAutofit/>
         </a:bodyPr>
         <a:lstStyle/>
         <a:p>
-          <a:pPr marL="57150" lvl="1" indent="-57150" algn="l" defTabSz="488950">
+          <a:pPr marL="114300" lvl="1" indent="-114300" algn="l" defTabSz="666750">
             <a:lnSpc>
               <a:spcPct val="90000"/>
             </a:lnSpc>
@@ -2255,7 +2204,7 @@
             <a:buChar char="•"/>
           </a:pPr>
           <a:r>
-            <a:rPr lang="en-US" sz="1100" kern="1200"/>
+            <a:rPr lang="en-US" sz="1500" kern="1200"/>
             <a:t>Voltage and Frequency</a:t>
           </a:r>
         </a:p>
@@ -3763,7 +3712,7 @@
           <a:p>
             <a:fld id="{A507B329-6D71-4301-B163-D81DAD561ACA}" type="datetimeFigureOut">
               <a:rPr lang="de-AT" smtClean="0"/>
-              <a:t>14.09.2026</a:t>
+              <a:t>17.09.2026</a:t>
             </a:fld>
             <a:endParaRPr lang="de-AT"/>
           </a:p>
@@ -3963,7 +3912,7 @@
           <a:p>
             <a:fld id="{A507B329-6D71-4301-B163-D81DAD561ACA}" type="datetimeFigureOut">
               <a:rPr lang="de-AT" smtClean="0"/>
-              <a:t>14.09.2026</a:t>
+              <a:t>17.09.2026</a:t>
             </a:fld>
             <a:endParaRPr lang="de-AT"/>
           </a:p>
@@ -4173,7 +4122,7 @@
           <a:p>
             <a:fld id="{A507B329-6D71-4301-B163-D81DAD561ACA}" type="datetimeFigureOut">
               <a:rPr lang="de-AT" smtClean="0"/>
-              <a:t>14.09.2026</a:t>
+              <a:t>17.09.2026</a:t>
             </a:fld>
             <a:endParaRPr lang="de-AT"/>
           </a:p>
@@ -4373,7 +4322,7 @@
           <a:p>
             <a:fld id="{A507B329-6D71-4301-B163-D81DAD561ACA}" type="datetimeFigureOut">
               <a:rPr lang="de-AT" smtClean="0"/>
-              <a:t>14.09.2026</a:t>
+              <a:t>17.09.2026</a:t>
             </a:fld>
             <a:endParaRPr lang="de-AT"/>
           </a:p>
@@ -4649,7 +4598,7 @@
           <a:p>
             <a:fld id="{A507B329-6D71-4301-B163-D81DAD561ACA}" type="datetimeFigureOut">
               <a:rPr lang="de-AT" smtClean="0"/>
-              <a:t>14.09.2026</a:t>
+              <a:t>17.09.2026</a:t>
             </a:fld>
             <a:endParaRPr lang="de-AT"/>
           </a:p>
@@ -4917,7 +4866,7 @@
           <a:p>
             <a:fld id="{A507B329-6D71-4301-B163-D81DAD561ACA}" type="datetimeFigureOut">
               <a:rPr lang="de-AT" smtClean="0"/>
-              <a:t>14.09.2026</a:t>
+              <a:t>17.09.2026</a:t>
             </a:fld>
             <a:endParaRPr lang="de-AT"/>
           </a:p>
@@ -5332,7 +5281,7 @@
           <a:p>
             <a:fld id="{A507B329-6D71-4301-B163-D81DAD561ACA}" type="datetimeFigureOut">
               <a:rPr lang="de-AT" smtClean="0"/>
-              <a:t>14.09.2026</a:t>
+              <a:t>17.09.2026</a:t>
             </a:fld>
             <a:endParaRPr lang="de-AT"/>
           </a:p>
@@ -5474,7 +5423,7 @@
           <a:p>
             <a:fld id="{A507B329-6D71-4301-B163-D81DAD561ACA}" type="datetimeFigureOut">
               <a:rPr lang="de-AT" smtClean="0"/>
-              <a:t>14.09.2026</a:t>
+              <a:t>17.09.2026</a:t>
             </a:fld>
             <a:endParaRPr lang="de-AT"/>
           </a:p>
@@ -5587,7 +5536,7 @@
           <a:p>
             <a:fld id="{A507B329-6D71-4301-B163-D81DAD561ACA}" type="datetimeFigureOut">
               <a:rPr lang="de-AT" smtClean="0"/>
-              <a:t>14.09.2026</a:t>
+              <a:t>17.09.2026</a:t>
             </a:fld>
             <a:endParaRPr lang="de-AT"/>
           </a:p>
@@ -5900,7 +5849,7 @@
           <a:p>
             <a:fld id="{A507B329-6D71-4301-B163-D81DAD561ACA}" type="datetimeFigureOut">
               <a:rPr lang="de-AT" smtClean="0"/>
-              <a:t>14.09.2026</a:t>
+              <a:t>17.09.2026</a:t>
             </a:fld>
             <a:endParaRPr lang="de-AT"/>
           </a:p>
@@ -6189,7 +6138,7 @@
           <a:p>
             <a:fld id="{A507B329-6D71-4301-B163-D81DAD561ACA}" type="datetimeFigureOut">
               <a:rPr lang="de-AT" smtClean="0"/>
-              <a:t>14.09.2026</a:t>
+              <a:t>17.09.2026</a:t>
             </a:fld>
             <a:endParaRPr lang="de-AT"/>
           </a:p>
@@ -6432,7 +6381,7 @@
           <a:p>
             <a:fld id="{A507B329-6D71-4301-B163-D81DAD561ACA}" type="datetimeFigureOut">
               <a:rPr lang="de-AT" smtClean="0"/>
-              <a:t>14.09.2026</a:t>
+              <a:t>17.09.2026</a:t>
             </a:fld>
             <a:endParaRPr lang="de-AT"/>
           </a:p>
@@ -8122,7 +8071,7 @@
             <p:ph idx="1"/>
             <p:extLst>
               <p:ext uri="{D42A27DB-BD31-4B8C-83A1-F6EECF244321}">
-                <p14:modId xmlns:p14="http://schemas.microsoft.com/office/powerpoint/2010/main" val="3792864266"/>
+                <p14:modId xmlns:p14="http://schemas.microsoft.com/office/powerpoint/2010/main" val="1589897672"/>
               </p:ext>
             </p:extLst>
           </p:nvPr>
